--- a/docs/distribution/store/listing/design-source/ja-JP/clipsave-store-listing-design-source.pptx
+++ b/docs/distribution/store/listing/design-source/ja-JP/clipsave-store-listing-design-source.pptx
@@ -267,7 +267,7 @@
           <a:p>
             <a:fld id="{46D3C7F6-BF65-453D-9C87-5BA16A0A8437}" type="datetimeFigureOut">
               <a:rPr kumimoji="1" lang="ja-JP" altLang="en-US" smtClean="0"/>
-              <a:t>2026/3/8</a:t>
+              <a:t>2026/3/12</a:t>
             </a:fld>
             <a:endParaRPr kumimoji="1" lang="ja-JP" altLang="en-US"/>
           </a:p>
@@ -497,7 +497,7 @@
           <a:p>
             <a:fld id="{46D3C7F6-BF65-453D-9C87-5BA16A0A8437}" type="datetimeFigureOut">
               <a:rPr kumimoji="1" lang="ja-JP" altLang="en-US" smtClean="0"/>
-              <a:t>2026/3/8</a:t>
+              <a:t>2026/3/12</a:t>
             </a:fld>
             <a:endParaRPr kumimoji="1" lang="ja-JP" altLang="en-US"/>
           </a:p>
@@ -737,7 +737,7 @@
           <a:p>
             <a:fld id="{46D3C7F6-BF65-453D-9C87-5BA16A0A8437}" type="datetimeFigureOut">
               <a:rPr kumimoji="1" lang="ja-JP" altLang="en-US" smtClean="0"/>
-              <a:t>2026/3/8</a:t>
+              <a:t>2026/3/12</a:t>
             </a:fld>
             <a:endParaRPr kumimoji="1" lang="ja-JP" altLang="en-US"/>
           </a:p>
@@ -967,7 +967,7 @@
           <a:p>
             <a:fld id="{46D3C7F6-BF65-453D-9C87-5BA16A0A8437}" type="datetimeFigureOut">
               <a:rPr kumimoji="1" lang="ja-JP" altLang="en-US" smtClean="0"/>
-              <a:t>2026/3/8</a:t>
+              <a:t>2026/3/12</a:t>
             </a:fld>
             <a:endParaRPr kumimoji="1" lang="ja-JP" altLang="en-US"/>
           </a:p>
@@ -1242,7 +1242,7 @@
           <a:p>
             <a:fld id="{46D3C7F6-BF65-453D-9C87-5BA16A0A8437}" type="datetimeFigureOut">
               <a:rPr kumimoji="1" lang="ja-JP" altLang="en-US" smtClean="0"/>
-              <a:t>2026/3/8</a:t>
+              <a:t>2026/3/12</a:t>
             </a:fld>
             <a:endParaRPr kumimoji="1" lang="ja-JP" altLang="en-US"/>
           </a:p>
@@ -1571,7 +1571,7 @@
           <a:p>
             <a:fld id="{46D3C7F6-BF65-453D-9C87-5BA16A0A8437}" type="datetimeFigureOut">
               <a:rPr kumimoji="1" lang="ja-JP" altLang="en-US" smtClean="0"/>
-              <a:t>2026/3/8</a:t>
+              <a:t>2026/3/12</a:t>
             </a:fld>
             <a:endParaRPr kumimoji="1" lang="ja-JP" altLang="en-US"/>
           </a:p>
@@ -2047,7 +2047,7 @@
           <a:p>
             <a:fld id="{46D3C7F6-BF65-453D-9C87-5BA16A0A8437}" type="datetimeFigureOut">
               <a:rPr kumimoji="1" lang="ja-JP" altLang="en-US" smtClean="0"/>
-              <a:t>2026/3/8</a:t>
+              <a:t>2026/3/12</a:t>
             </a:fld>
             <a:endParaRPr kumimoji="1" lang="ja-JP" altLang="en-US"/>
           </a:p>
@@ -2188,7 +2188,7 @@
           <a:p>
             <a:fld id="{46D3C7F6-BF65-453D-9C87-5BA16A0A8437}" type="datetimeFigureOut">
               <a:rPr kumimoji="1" lang="ja-JP" altLang="en-US" smtClean="0"/>
-              <a:t>2026/3/8</a:t>
+              <a:t>2026/3/12</a:t>
             </a:fld>
             <a:endParaRPr kumimoji="1" lang="ja-JP" altLang="en-US"/>
           </a:p>
@@ -2301,7 +2301,7 @@
           <a:p>
             <a:fld id="{46D3C7F6-BF65-453D-9C87-5BA16A0A8437}" type="datetimeFigureOut">
               <a:rPr kumimoji="1" lang="ja-JP" altLang="en-US" smtClean="0"/>
-              <a:t>2026/3/8</a:t>
+              <a:t>2026/3/12</a:t>
             </a:fld>
             <a:endParaRPr kumimoji="1" lang="ja-JP" altLang="en-US"/>
           </a:p>
@@ -2644,7 +2644,7 @@
           <a:p>
             <a:fld id="{46D3C7F6-BF65-453D-9C87-5BA16A0A8437}" type="datetimeFigureOut">
               <a:rPr kumimoji="1" lang="ja-JP" altLang="en-US" smtClean="0"/>
-              <a:t>2026/3/8</a:t>
+              <a:t>2026/3/12</a:t>
             </a:fld>
             <a:endParaRPr kumimoji="1" lang="ja-JP" altLang="en-US"/>
           </a:p>
@@ -2932,7 +2932,7 @@
           <a:p>
             <a:fld id="{46D3C7F6-BF65-453D-9C87-5BA16A0A8437}" type="datetimeFigureOut">
               <a:rPr kumimoji="1" lang="ja-JP" altLang="en-US" smtClean="0"/>
-              <a:t>2026/3/8</a:t>
+              <a:t>2026/3/12</a:t>
             </a:fld>
             <a:endParaRPr kumimoji="1" lang="ja-JP" altLang="en-US"/>
           </a:p>
@@ -3205,7 +3205,7 @@
           <a:p>
             <a:fld id="{46D3C7F6-BF65-453D-9C87-5BA16A0A8437}" type="datetimeFigureOut">
               <a:rPr kumimoji="1" lang="ja-JP" altLang="en-US" smtClean="0"/>
-              <a:t>2026/3/8</a:t>
+              <a:t>2026/3/12</a:t>
             </a:fld>
             <a:endParaRPr kumimoji="1" lang="ja-JP" altLang="en-US"/>
           </a:p>
@@ -3680,6 +3680,88 @@
           <a:chExt cx="0" cy="0"/>
         </a:xfrm>
       </p:grpSpPr>
+      <p:grpSp>
+        <p:nvGrpSpPr>
+          <p:cNvPr id="11" name="グループ化 10">
+            <a:extLst>
+              <a:ext uri="{FF2B5EF4-FFF2-40B4-BE49-F238E27FC236}">
+                <a16:creationId xmlns:a16="http://schemas.microsoft.com/office/drawing/2014/main" id="{8D13B0A4-7592-E149-96BB-E778E4731FD6}"/>
+              </a:ext>
+            </a:extLst>
+          </p:cNvPr>
+          <p:cNvGrpSpPr/>
+          <p:nvPr/>
+        </p:nvGrpSpPr>
+        <p:grpSpPr>
+          <a:xfrm>
+            <a:off x="3011031" y="3993112"/>
+            <a:ext cx="6078497" cy="2575395"/>
+            <a:chOff x="3011031" y="3993112"/>
+            <a:chExt cx="6078497" cy="2575395"/>
+          </a:xfrm>
+        </p:grpSpPr>
+        <p:pic>
+          <p:nvPicPr>
+            <p:cNvPr id="6" name="図 5">
+              <a:extLst>
+                <a:ext uri="{FF2B5EF4-FFF2-40B4-BE49-F238E27FC236}">
+                  <a16:creationId xmlns:a16="http://schemas.microsoft.com/office/drawing/2014/main" id="{568BE369-F281-AC47-926B-BA5EE8014F14}"/>
+                </a:ext>
+              </a:extLst>
+            </p:cNvPr>
+            <p:cNvPicPr>
+              <a:picLocks noChangeAspect="1"/>
+            </p:cNvPicPr>
+            <p:nvPr/>
+          </p:nvPicPr>
+          <p:blipFill>
+            <a:blip r:embed="rId2"/>
+            <a:srcRect b="50723"/>
+            <a:stretch>
+              <a:fillRect/>
+            </a:stretch>
+          </p:blipFill>
+          <p:spPr>
+            <a:xfrm>
+              <a:off x="3011031" y="3993112"/>
+              <a:ext cx="6078497" cy="2575395"/>
+            </a:xfrm>
+            <a:prstGeom prst="rect">
+              <a:avLst/>
+            </a:prstGeom>
+          </p:spPr>
+        </p:pic>
+        <p:pic>
+          <p:nvPicPr>
+            <p:cNvPr id="10" name="図 9">
+              <a:extLst>
+                <a:ext uri="{FF2B5EF4-FFF2-40B4-BE49-F238E27FC236}">
+                  <a16:creationId xmlns:a16="http://schemas.microsoft.com/office/drawing/2014/main" id="{6D18DDCA-E137-6479-58FE-1CD52423F07D}"/>
+                </a:ext>
+              </a:extLst>
+            </p:cNvPr>
+            <p:cNvPicPr>
+              <a:picLocks noChangeAspect="1"/>
+            </p:cNvPicPr>
+            <p:nvPr/>
+          </p:nvPicPr>
+          <p:blipFill>
+            <a:blip r:embed="rId3"/>
+            <a:stretch>
+              <a:fillRect/>
+            </a:stretch>
+          </p:blipFill>
+          <p:spPr>
+            <a:xfrm>
+              <a:off x="7176303" y="5617639"/>
+              <a:ext cx="314369" cy="219106"/>
+            </a:xfrm>
+            <a:prstGeom prst="rect">
+              <a:avLst/>
+            </a:prstGeom>
+          </p:spPr>
+        </p:pic>
+      </p:grpSp>
       <p:pic>
         <p:nvPicPr>
           <p:cNvPr id="4" name="図 3">
@@ -3695,15 +3777,16 @@
           <p:nvPr/>
         </p:nvPicPr>
         <p:blipFill>
-          <a:blip r:embed="rId2"/>
+          <a:blip r:embed="rId4"/>
+          <a:srcRect t="5455"/>
           <a:stretch>
             <a:fillRect/>
           </a:stretch>
         </p:blipFill>
         <p:spPr>
           <a:xfrm>
-            <a:off x="450925" y="688790"/>
-            <a:ext cx="3676858" cy="2459420"/>
+            <a:off x="450925" y="789897"/>
+            <a:ext cx="3676858" cy="2325249"/>
           </a:xfrm>
           <a:prstGeom prst="rect">
             <a:avLst/>
@@ -3725,46 +3808,16 @@
           <p:nvPr/>
         </p:nvPicPr>
         <p:blipFill>
-          <a:blip r:embed="rId3"/>
+          <a:blip r:embed="rId5"/>
+          <a:srcRect t="4216"/>
           <a:stretch>
             <a:fillRect/>
           </a:stretch>
         </p:blipFill>
         <p:spPr>
           <a:xfrm>
-            <a:off x="4289767" y="688790"/>
-            <a:ext cx="3683012" cy="2459420"/>
-          </a:xfrm>
-          <a:prstGeom prst="rect">
-            <a:avLst/>
-          </a:prstGeom>
-        </p:spPr>
-      </p:pic>
-      <p:pic>
-        <p:nvPicPr>
-          <p:cNvPr id="6" name="図 5">
-            <a:extLst>
-              <a:ext uri="{FF2B5EF4-FFF2-40B4-BE49-F238E27FC236}">
-                <a16:creationId xmlns:a16="http://schemas.microsoft.com/office/drawing/2014/main" id="{568BE369-F281-AC47-926B-BA5EE8014F14}"/>
-              </a:ext>
-            </a:extLst>
-          </p:cNvPr>
-          <p:cNvPicPr>
-            <a:picLocks noChangeAspect="1"/>
-          </p:cNvPicPr>
-          <p:nvPr/>
-        </p:nvPicPr>
-        <p:blipFill>
-          <a:blip r:embed="rId4"/>
-          <a:srcRect b="50723"/>
-          <a:stretch>
-            <a:fillRect/>
-          </a:stretch>
-        </p:blipFill>
-        <p:spPr>
-          <a:xfrm>
-            <a:off x="3011031" y="3993112"/>
-            <a:ext cx="6078497" cy="2575395"/>
+            <a:off x="4337688" y="794003"/>
+            <a:ext cx="3628937" cy="2321143"/>
           </a:xfrm>
           <a:prstGeom prst="rect">
             <a:avLst/>
@@ -3833,160 +3886,19 @@
           <p:nvPr/>
         </p:nvPicPr>
         <p:blipFill>
-          <a:blip r:embed="rId5"/>
+          <a:blip r:embed="rId6"/>
           <a:stretch>
             <a:fillRect/>
           </a:stretch>
         </p:blipFill>
         <p:spPr>
           <a:xfrm>
-            <a:off x="8134763" y="693683"/>
-            <a:ext cx="3639050" cy="2454527"/>
+            <a:off x="8176530" y="794003"/>
+            <a:ext cx="3441297" cy="2321143"/>
           </a:xfrm>
           <a:prstGeom prst="rect">
             <a:avLst/>
           </a:prstGeom>
-        </p:spPr>
-      </p:pic>
-      <p:pic>
-        <p:nvPicPr>
-          <p:cNvPr id="1026" name="Picture 2" descr="ファイル タイプ powerpoint の アイコン">
-            <a:extLst>
-              <a:ext uri="{FF2B5EF4-FFF2-40B4-BE49-F238E27FC236}">
-                <a16:creationId xmlns:a16="http://schemas.microsoft.com/office/drawing/2014/main" id="{65AF880E-10EC-E66D-777A-341DF5D31713}"/>
-              </a:ext>
-            </a:extLst>
-          </p:cNvPr>
-          <p:cNvPicPr>
-            <a:picLocks noChangeAspect="1" noChangeArrowheads="1"/>
-          </p:cNvPicPr>
-          <p:nvPr/>
-        </p:nvPicPr>
-        <p:blipFill>
-          <a:blip r:embed="rId6">
-            <a:extLst>
-              <a:ext uri="{28A0092B-C50C-407E-A947-70E740481C1C}">
-                <a14:useLocalDpi xmlns:a14="http://schemas.microsoft.com/office/drawing/2010/main" val="0"/>
-              </a:ext>
-            </a:extLst>
-          </a:blip>
-          <a:srcRect/>
-          <a:stretch>
-            <a:fillRect/>
-          </a:stretch>
-        </p:blipFill>
-        <p:spPr bwMode="auto">
-          <a:xfrm>
-            <a:off x="3258888" y="688790"/>
-            <a:ext cx="868895" cy="868895"/>
-          </a:xfrm>
-          <a:prstGeom prst="rect">
-            <a:avLst/>
-          </a:prstGeom>
-          <a:noFill/>
-          <a:extLst>
-            <a:ext uri="{909E8E84-426E-40DD-AFC4-6F175D3DCCD1}">
-              <a14:hiddenFill xmlns:a14="http://schemas.microsoft.com/office/drawing/2010/main">
-                <a:solidFill>
-                  <a:srgbClr val="FFFFFF"/>
-                </a:solidFill>
-              </a14:hiddenFill>
-            </a:ext>
-          </a:extLst>
-        </p:spPr>
-      </p:pic>
-      <p:pic>
-        <p:nvPicPr>
-          <p:cNvPr id="1028" name="Picture 4">
-            <a:extLst>
-              <a:ext uri="{FF2B5EF4-FFF2-40B4-BE49-F238E27FC236}">
-                <a16:creationId xmlns:a16="http://schemas.microsoft.com/office/drawing/2014/main" id="{215E411B-7D77-B2A8-37BB-F7334EB07456}"/>
-              </a:ext>
-            </a:extLst>
-          </p:cNvPr>
-          <p:cNvPicPr>
-            <a:picLocks noChangeAspect="1" noChangeArrowheads="1"/>
-          </p:cNvPicPr>
-          <p:nvPr/>
-        </p:nvPicPr>
-        <p:blipFill>
-          <a:blip r:embed="rId7">
-            <a:extLst>
-              <a:ext uri="{28A0092B-C50C-407E-A947-70E740481C1C}">
-                <a14:useLocalDpi xmlns:a14="http://schemas.microsoft.com/office/drawing/2010/main" val="0"/>
-              </a:ext>
-            </a:extLst>
-          </a:blip>
-          <a:srcRect/>
-          <a:stretch>
-            <a:fillRect/>
-          </a:stretch>
-        </p:blipFill>
-        <p:spPr bwMode="auto">
-          <a:xfrm>
-            <a:off x="7172022" y="750275"/>
-            <a:ext cx="745924" cy="745924"/>
-          </a:xfrm>
-          <a:prstGeom prst="rect">
-            <a:avLst/>
-          </a:prstGeom>
-          <a:noFill/>
-          <a:extLst>
-            <a:ext uri="{909E8E84-426E-40DD-AFC4-6F175D3DCCD1}">
-              <a14:hiddenFill xmlns:a14="http://schemas.microsoft.com/office/drawing/2010/main">
-                <a:solidFill>
-                  <a:srgbClr val="FFFFFF"/>
-                </a:solidFill>
-              </a14:hiddenFill>
-            </a:ext>
-          </a:extLst>
-        </p:spPr>
-      </p:pic>
-      <p:pic>
-        <p:nvPicPr>
-          <p:cNvPr id="1030" name="Picture 6">
-            <a:extLst>
-              <a:ext uri="{FF2B5EF4-FFF2-40B4-BE49-F238E27FC236}">
-                <a16:creationId xmlns:a16="http://schemas.microsoft.com/office/drawing/2014/main" id="{3E59B69C-2C4F-D716-F684-37C1D7232E0B}"/>
-              </a:ext>
-            </a:extLst>
-          </p:cNvPr>
-          <p:cNvPicPr>
-            <a:picLocks noChangeAspect="1" noChangeArrowheads="1"/>
-          </p:cNvPicPr>
-          <p:nvPr/>
-        </p:nvPicPr>
-        <p:blipFill>
-          <a:blip r:embed="rId8">
-            <a:extLst>
-              <a:ext uri="{28A0092B-C50C-407E-A947-70E740481C1C}">
-                <a14:useLocalDpi xmlns:a14="http://schemas.microsoft.com/office/drawing/2010/main" val="0"/>
-              </a:ext>
-            </a:extLst>
-          </a:blip>
-          <a:srcRect/>
-          <a:stretch>
-            <a:fillRect/>
-          </a:stretch>
-        </p:blipFill>
-        <p:spPr bwMode="auto">
-          <a:xfrm>
-            <a:off x="10975339" y="738393"/>
-            <a:ext cx="695316" cy="695316"/>
-          </a:xfrm>
-          <a:prstGeom prst="rect">
-            <a:avLst/>
-          </a:prstGeom>
-          <a:noFill/>
-          <a:extLst>
-            <a:ext uri="{909E8E84-426E-40DD-AFC4-6F175D3DCCD1}">
-              <a14:hiddenFill xmlns:a14="http://schemas.microsoft.com/office/drawing/2010/main">
-                <a:solidFill>
-                  <a:srgbClr val="FFFFFF"/>
-                </a:solidFill>
-              </a14:hiddenFill>
-            </a:ext>
-          </a:extLst>
         </p:spPr>
       </p:pic>
       <p:sp>
@@ -4205,6 +4117,210 @@
               <a:latin typeface="CaskaydiaCove NF" panose="02000009000000000000" pitchFamily="50" charset="0"/>
               <a:cs typeface="CaskaydiaCove NF" panose="02000009000000000000" pitchFamily="50" charset="0"/>
             </a:endParaRPr>
+          </a:p>
+        </p:txBody>
+      </p:sp>
+      <p:sp>
+        <p:nvSpPr>
+          <p:cNvPr id="25" name="正方形/長方形 24">
+            <a:extLst>
+              <a:ext uri="{FF2B5EF4-FFF2-40B4-BE49-F238E27FC236}">
+                <a16:creationId xmlns:a16="http://schemas.microsoft.com/office/drawing/2014/main" id="{E374042D-585A-93EF-756B-F209DA2C72FE}"/>
+              </a:ext>
+            </a:extLst>
+          </p:cNvPr>
+          <p:cNvSpPr/>
+          <p:nvPr/>
+        </p:nvSpPr>
+        <p:spPr>
+          <a:xfrm>
+            <a:off x="2449175" y="789897"/>
+            <a:ext cx="1678608" cy="431020"/>
+          </a:xfrm>
+          <a:prstGeom prst="rect">
+            <a:avLst/>
+          </a:prstGeom>
+        </p:spPr>
+        <p:style>
+          <a:lnRef idx="1">
+            <a:schemeClr val="accent4"/>
+          </a:lnRef>
+          <a:fillRef idx="3">
+            <a:schemeClr val="accent4"/>
+          </a:fillRef>
+          <a:effectRef idx="2">
+            <a:schemeClr val="accent4"/>
+          </a:effectRef>
+          <a:fontRef idx="minor">
+            <a:schemeClr val="lt1"/>
+          </a:fontRef>
+        </p:style>
+        <p:txBody>
+          <a:bodyPr rtlCol="0" anchor="ctr"/>
+          <a:lstStyle/>
+          <a:p>
+            <a:pPr algn="ctr"/>
+            <a:r>
+              <a:rPr kumimoji="1" lang="ja-JP" altLang="en-US" dirty="0">
+                <a:latin typeface="UD デジタル 教科書体 N" panose="02020400000000000000" pitchFamily="17" charset="-128"/>
+                <a:ea typeface="UD デジタル 教科書体 N" panose="02020400000000000000" pitchFamily="17" charset="-128"/>
+                <a:cs typeface="CaskaydiaCove NF" panose="02000009000000000000" pitchFamily="50" charset="0"/>
+              </a:rPr>
+              <a:t>スライド</a:t>
+            </a:r>
+          </a:p>
+        </p:txBody>
+      </p:sp>
+      <p:sp>
+        <p:nvSpPr>
+          <p:cNvPr id="2" name="正方形/長方形 1">
+            <a:extLst>
+              <a:ext uri="{FF2B5EF4-FFF2-40B4-BE49-F238E27FC236}">
+                <a16:creationId xmlns:a16="http://schemas.microsoft.com/office/drawing/2014/main" id="{B0D4B349-4ACE-CFF2-9C63-4FA213E55357}"/>
+              </a:ext>
+            </a:extLst>
+          </p:cNvPr>
+          <p:cNvSpPr/>
+          <p:nvPr/>
+        </p:nvSpPr>
+        <p:spPr>
+          <a:xfrm>
+            <a:off x="6288017" y="789897"/>
+            <a:ext cx="1678608" cy="431020"/>
+          </a:xfrm>
+          <a:prstGeom prst="rect">
+            <a:avLst/>
+          </a:prstGeom>
+        </p:spPr>
+        <p:style>
+          <a:lnRef idx="1">
+            <a:schemeClr val="accent4"/>
+          </a:lnRef>
+          <a:fillRef idx="3">
+            <a:schemeClr val="accent4"/>
+          </a:fillRef>
+          <a:effectRef idx="2">
+            <a:schemeClr val="accent4"/>
+          </a:effectRef>
+          <a:fontRef idx="minor">
+            <a:schemeClr val="lt1"/>
+          </a:fontRef>
+        </p:style>
+        <p:txBody>
+          <a:bodyPr rtlCol="0" anchor="ctr"/>
+          <a:lstStyle/>
+          <a:p>
+            <a:pPr algn="ctr"/>
+            <a:r>
+              <a:rPr kumimoji="1" lang="ja-JP" altLang="en-US" dirty="0">
+                <a:latin typeface="UD デジタル 教科書体 N" panose="02020400000000000000" pitchFamily="17" charset="-128"/>
+                <a:ea typeface="UD デジタル 教科書体 N" panose="02020400000000000000" pitchFamily="17" charset="-128"/>
+                <a:cs typeface="CaskaydiaCove NF" panose="02000009000000000000" pitchFamily="50" charset="0"/>
+              </a:rPr>
+              <a:t>ノート</a:t>
+            </a:r>
+          </a:p>
+        </p:txBody>
+      </p:sp>
+      <p:sp>
+        <p:nvSpPr>
+          <p:cNvPr id="3" name="正方形/長方形 2">
+            <a:extLst>
+              <a:ext uri="{FF2B5EF4-FFF2-40B4-BE49-F238E27FC236}">
+                <a16:creationId xmlns:a16="http://schemas.microsoft.com/office/drawing/2014/main" id="{507B8DE4-6F89-0F40-7E02-EEE603740B6C}"/>
+              </a:ext>
+            </a:extLst>
+          </p:cNvPr>
+          <p:cNvSpPr/>
+          <p:nvPr/>
+        </p:nvSpPr>
+        <p:spPr>
+          <a:xfrm>
+            <a:off x="9939219" y="789897"/>
+            <a:ext cx="1678608" cy="431020"/>
+          </a:xfrm>
+          <a:prstGeom prst="rect">
+            <a:avLst/>
+          </a:prstGeom>
+        </p:spPr>
+        <p:style>
+          <a:lnRef idx="1">
+            <a:schemeClr val="accent4"/>
+          </a:lnRef>
+          <a:fillRef idx="3">
+            <a:schemeClr val="accent4"/>
+          </a:fillRef>
+          <a:effectRef idx="2">
+            <a:schemeClr val="accent4"/>
+          </a:effectRef>
+          <a:fontRef idx="minor">
+            <a:schemeClr val="lt1"/>
+          </a:fontRef>
+        </p:style>
+        <p:txBody>
+          <a:bodyPr rtlCol="0" anchor="ctr"/>
+          <a:lstStyle/>
+          <a:p>
+            <a:pPr algn="ctr"/>
+            <a:r>
+              <a:rPr kumimoji="1" lang="ja-JP" altLang="en-US" dirty="0">
+                <a:latin typeface="UD デジタル 教科書体 N" panose="02020400000000000000" pitchFamily="17" charset="-128"/>
+                <a:ea typeface="UD デジタル 教科書体 N" panose="02020400000000000000" pitchFamily="17" charset="-128"/>
+                <a:cs typeface="CaskaydiaCove NF" panose="02000009000000000000" pitchFamily="50" charset="0"/>
+              </a:rPr>
+              <a:t>ウェブ</a:t>
+            </a:r>
+          </a:p>
+        </p:txBody>
+      </p:sp>
+      <p:sp>
+        <p:nvSpPr>
+          <p:cNvPr id="8" name="正方形/長方形 7">
+            <a:extLst>
+              <a:ext uri="{FF2B5EF4-FFF2-40B4-BE49-F238E27FC236}">
+                <a16:creationId xmlns:a16="http://schemas.microsoft.com/office/drawing/2014/main" id="{60C64283-864B-66AD-A56F-9F3F3715B8D3}"/>
+              </a:ext>
+            </a:extLst>
+          </p:cNvPr>
+          <p:cNvSpPr/>
+          <p:nvPr/>
+        </p:nvSpPr>
+        <p:spPr>
+          <a:xfrm>
+            <a:off x="7290816" y="3993112"/>
+            <a:ext cx="1798712" cy="431020"/>
+          </a:xfrm>
+          <a:prstGeom prst="rect">
+            <a:avLst/>
+          </a:prstGeom>
+        </p:spPr>
+        <p:style>
+          <a:lnRef idx="1">
+            <a:schemeClr val="accent4"/>
+          </a:lnRef>
+          <a:fillRef idx="3">
+            <a:schemeClr val="accent4"/>
+          </a:fillRef>
+          <a:effectRef idx="2">
+            <a:schemeClr val="accent4"/>
+          </a:effectRef>
+          <a:fontRef idx="minor">
+            <a:schemeClr val="lt1"/>
+          </a:fontRef>
+        </p:style>
+        <p:txBody>
+          <a:bodyPr rtlCol="0" anchor="ctr"/>
+          <a:lstStyle/>
+          <a:p>
+            <a:pPr algn="ctr"/>
+            <a:r>
+              <a:rPr kumimoji="1" lang="ja-JP" altLang="en-US" dirty="0">
+                <a:latin typeface="UD デジタル 教科書体 N" panose="02020400000000000000" pitchFamily="17" charset="-128"/>
+                <a:ea typeface="UD デジタル 教科書体 N" panose="02020400000000000000" pitchFamily="17" charset="-128"/>
+                <a:cs typeface="CaskaydiaCove NF" panose="02000009000000000000" pitchFamily="50" charset="0"/>
+              </a:rPr>
+              <a:t>エクスプローラ</a:t>
+            </a:r>
           </a:p>
         </p:txBody>
       </p:sp>
